--- a/output/LINK. voorstel MultiPart.pptx
+++ b/output/LINK. voorstel MultiPart.pptx
@@ -9847,7 +9847,7 @@
                 <a:ea typeface="Arial" pitchFamily="34" charset="-122"/>
                 <a:cs typeface="Arial" pitchFamily="34" charset="-120"/>
               </a:rPr>
-              <a:t>Ruim </a:t>
+              <a:t>Precies </a:t>
             </a:r>
             <a:pPr algn="l" indent="0" marL="0">
               <a:lnSpc>
@@ -9864,7 +9864,7 @@
                 <a:ea typeface="Georgia" pitchFamily="34" charset="-122"/>
                 <a:cs typeface="Georgia" pitchFamily="34" charset="-120"/>
               </a:rPr>
-              <a:t>1.500 autobedrijven</a:t>
+              <a:t>1.751 autobedrijven</a:t>
             </a:r>
             <a:pPr algn="l" indent="0" marL="0">
               <a:lnSpc>
@@ -9942,7 +9942,7 @@
                 <a:ea typeface="Arial" pitchFamily="34" charset="-122"/>
                 <a:cs typeface="Arial" pitchFamily="34" charset="-120"/>
               </a:rPr>
-              <a:t>1.500+</a:t>
+              <a:t>1.751</a:t>
             </a:r>
             <a:endParaRPr lang="en-US" sz="3600" dirty="0"/>
           </a:p>
@@ -10226,7 +10226,7 @@
                 <a:ea typeface="Arial" pitchFamily="34" charset="-122"/>
                 <a:cs typeface="Arial" pitchFamily="34" charset="-120"/>
               </a:rPr>
-              <a:t>± 19</a:t>
+              <a:t>± 22</a:t>
             </a:r>
             <a:endParaRPr lang="en-US" sz="3600" dirty="0"/>
           </a:p>
@@ -10508,7 +10508,7 @@
                 <a:ea typeface="Arial" pitchFamily="34" charset="-122"/>
                 <a:cs typeface="Arial" pitchFamily="34" charset="-120"/>
               </a:rPr>
-              <a:t>De aantallen zijn een indicatie. Het aantal pogingen per bedrijf komt uit onze eigen campagnes, de marktomvang uit onze datatool. In de kick-off scherpen we de lijst aan op merk, omvang en regio.</a:t>
+              <a:t>Het aantal bedrijven is geteld, niet geschat. Het aantal pogingen per bedrijf komt uit onze eigen campagnes en is dus een indicatie. In de kick-off scherpen we de lijst aan op merk, omvang en regio.</a:t>
             </a:r>
             <a:endParaRPr lang="en-US" sz="1200" dirty="0"/>
           </a:p>
@@ -11028,7 +11028,7 @@
                 <a:ea typeface="Arial" pitchFamily="34" charset="-122"/>
                 <a:cs typeface="Arial" pitchFamily="34" charset="-120"/>
               </a:rPr>
-              <a:t>5 werkperiodes</a:t>
+              <a:t>6 werkperiodes</a:t>
             </a:r>
             <a:endParaRPr lang="en-US" sz="1250" dirty="0"/>
           </a:p>
@@ -11067,7 +11067,7 @@
                 <a:ea typeface="Arial" pitchFamily="34" charset="-122"/>
                 <a:cs typeface="Arial" pitchFamily="34" charset="-120"/>
               </a:rPr>
-              <a:t>20 weken</a:t>
+              <a:t>24 weken</a:t>
             </a:r>
             <a:endParaRPr lang="en-US" sz="1250" dirty="0"/>
           </a:p>
@@ -11207,7 +11207,7 @@
                 <a:ea typeface="Arial" pitchFamily="34" charset="-122"/>
                 <a:cs typeface="Arial" pitchFamily="34" charset="-120"/>
               </a:rPr>
-              <a:t>13 weken</a:t>
+              <a:t>16 weken</a:t>
             </a:r>
             <a:endParaRPr lang="en-US" sz="1250" dirty="0"/>
           </a:p>
@@ -11369,7 +11369,7 @@
                 <a:ea typeface="Arial" pitchFamily="34" charset="-122"/>
                 <a:cs typeface="Arial" pitchFamily="34" charset="-120"/>
               </a:rPr>
-              <a:t>10 weken</a:t>
+              <a:t>12 weken</a:t>
             </a:r>
             <a:endParaRPr lang="en-US" sz="1250" dirty="0"/>
           </a:p>
@@ -11428,7 +11428,7 @@
                 <a:ea typeface="Arial" pitchFamily="34" charset="-122"/>
                 <a:cs typeface="Arial" pitchFamily="34" charset="-120"/>
               </a:rPr>
-              <a:t>Na één ronde begin je opnieuw bij de bedrijven die toen net getekend hadden of geen tijd hadden. Elke ronde levert nieuwe kansen op, want contracten lopen af en voorraden wisselen.</a:t>
+              <a:t>Met 22 beldagen heb je elk autobedrijf in Nederland één keer gesproken. Daarna begin je opnieuw bij de bedrijven die toen net getekend hadden of geen tijd hadden. Contracten lopen af en voorraden wisselen, dus elke ronde levert nieuwe kansen op.</a:t>
             </a:r>
             <a:endParaRPr lang="en-US" sz="1200" dirty="0"/>
           </a:p>

--- a/output/LINK. voorstel MultiPart.pptx
+++ b/output/LINK. voorstel MultiPart.pptx
@@ -3518,7 +3518,7 @@
                 <a:ea typeface="Arial" pitchFamily="34" charset="-122"/>
                 <a:cs typeface="Arial" pitchFamily="34" charset="-120"/>
               </a:rPr>
-              <a:t>Goedkeuring belscript</a:t>
+              <a:t>Goedkeuring op de USP's</a:t>
             </a:r>
             <a:endParaRPr lang="en-US" sz="1450" dirty="0"/>
           </a:p>
@@ -6552,7 +6552,7 @@
                 <a:ea typeface="Arial" pitchFamily="34" charset="-122"/>
                 <a:cs typeface="Arial" pitchFamily="34" charset="-120"/>
               </a:rPr>
-              <a:t>Eén persoon die jullie campagne kent, van script tot rapportage.</a:t>
+              <a:t>Eén persoon die jullie campagne kent, van kick-off tot rapportage.</a:t>
             </a:r>
             <a:endParaRPr lang="en-US" sz="950" dirty="0"/>
           </a:p>
@@ -8025,7 +8025,7 @@
                 <a:ea typeface="Arial" pitchFamily="34" charset="-122"/>
                 <a:cs typeface="Arial" pitchFamily="34" charset="-120"/>
               </a:rPr>
-              <a:t>Samen scherp: doelgroep, beslisser, propositie, bezwaren en wat een goede afspraak voor jullie is. Wij schrijven het belscript, jullie keuren goed.</a:t>
+              <a:t>Samen scherp: doelgroep, beslisser, propositie, bezwaren en wat een goede afspraak voor jullie is. Wij leggen de USP's en de opbouw van het gesprek vast, jullie keuren goed.</a:t>
             </a:r>
             <a:endParaRPr lang="en-US" sz="900" dirty="0"/>
           </a:p>
@@ -11836,7 +11836,7 @@
                 <a:ea typeface="Arial" pitchFamily="34" charset="-122"/>
                 <a:cs typeface="Arial" pitchFamily="34" charset="-120"/>
               </a:rPr>
-              <a:t>Kick-off en belscript</a:t>
+              <a:t>Kick-off en USP's</a:t>
             </a:r>
             <a:endParaRPr lang="en-US" sz="1150" dirty="0"/>
           </a:p>
@@ -11878,7 +11878,7 @@
                 <a:ea typeface="Arial" pitchFamily="34" charset="-122"/>
                 <a:cs typeface="Arial" pitchFamily="34" charset="-120"/>
               </a:rPr>
-              <a:t>Samen scherp wat we gaan vertellen en bij wie. Wij schrijven het belscript, jullie keuren het goed.</a:t>
+              <a:t>Samen scherp wat we gaan vertellen en bij wie. Wij leggen de USP's vast, jullie keuren ze goed.</a:t>
             </a:r>
             <a:endParaRPr lang="en-US" sz="875" dirty="0"/>
           </a:p>
@@ -12597,7 +12597,7 @@
         <p:spPr>
           <a:xfrm>
             <a:off x="3733791" y="5245087"/>
-            <a:ext cx="3555991" cy="215899"/>
+            <a:ext cx="3746491" cy="215899"/>
           </a:xfrm>
           <a:prstGeom prst="rect">
             <a:avLst/>
@@ -12621,7 +12621,7 @@
                 <a:ea typeface="Arial" pitchFamily="34" charset="-122"/>
                 <a:cs typeface="Arial" pitchFamily="34" charset="-120"/>
               </a:rPr>
-              <a:t>Kick-off en belscript</a:t>
+              <a:t>Kick-off en USP's</a:t>
             </a:r>
             <a:endParaRPr lang="en-US" sz="900" dirty="0"/>
           </a:p>
@@ -12643,7 +12643,7 @@
         </p:blipFill>
         <p:spPr>
           <a:xfrm>
-            <a:off x="7340582" y="5276837"/>
+            <a:off x="7556481" y="5276837"/>
             <a:ext cx="127000" cy="127000"/>
           </a:xfrm>
           <a:prstGeom prst="rect">
@@ -12659,8 +12659,8 @@
         </p:nvSpPr>
         <p:spPr>
           <a:xfrm>
-            <a:off x="7543781" y="5245087"/>
-            <a:ext cx="3555991" cy="215899"/>
+            <a:off x="7759681" y="5245087"/>
+            <a:ext cx="3746491" cy="215899"/>
           </a:xfrm>
           <a:prstGeom prst="rect">
             <a:avLst/>
@@ -12723,7 +12723,7 @@
         <p:spPr>
           <a:xfrm>
             <a:off x="3733791" y="5499086"/>
-            <a:ext cx="3555991" cy="215899"/>
+            <a:ext cx="3746491" cy="215899"/>
           </a:xfrm>
           <a:prstGeom prst="rect">
             <a:avLst/>
@@ -12769,7 +12769,7 @@
         </p:blipFill>
         <p:spPr>
           <a:xfrm>
-            <a:off x="7340582" y="5530836"/>
+            <a:off x="7556481" y="5530836"/>
             <a:ext cx="127000" cy="127000"/>
           </a:xfrm>
           <a:prstGeom prst="rect">
@@ -12785,8 +12785,8 @@
         </p:nvSpPr>
         <p:spPr>
           <a:xfrm>
-            <a:off x="7543781" y="5499086"/>
-            <a:ext cx="3555991" cy="215899"/>
+            <a:off x="7759681" y="5499086"/>
+            <a:ext cx="3746491" cy="215899"/>
           </a:xfrm>
           <a:prstGeom prst="rect">
             <a:avLst/>
@@ -12849,7 +12849,7 @@
         <p:spPr>
           <a:xfrm>
             <a:off x="3733791" y="5753086"/>
-            <a:ext cx="3555991" cy="215899"/>
+            <a:ext cx="3746491" cy="215899"/>
           </a:xfrm>
           <a:prstGeom prst="rect">
             <a:avLst/>
@@ -12895,7 +12895,7 @@
         </p:blipFill>
         <p:spPr>
           <a:xfrm>
-            <a:off x="7340582" y="5784836"/>
+            <a:off x="7556481" y="5784836"/>
             <a:ext cx="127000" cy="127000"/>
           </a:xfrm>
           <a:prstGeom prst="rect">
@@ -12911,8 +12911,8 @@
         </p:nvSpPr>
         <p:spPr>
           <a:xfrm>
-            <a:off x="7543781" y="5753086"/>
-            <a:ext cx="3555991" cy="215899"/>
+            <a:off x="7759681" y="5753086"/>
+            <a:ext cx="3746491" cy="215899"/>
           </a:xfrm>
           <a:prstGeom prst="rect">
             <a:avLst/>
